--- a/report/Сидоров_Фокин_Презентация.pptx
+++ b/report/Сидоров_Фокин_Презентация.pptx
@@ -4804,7 +4804,7 @@
         <p:spPr>
           <a:xfrm>
             <a:off x="5430516" y="2697480"/>
-            <a:ext cx="1300487" cy="3611880"/>
+            <a:ext cx="1990912" cy="3611880"/>
           </a:xfrm>
           <a:prstGeom prst="rect">
             <a:avLst/>
@@ -5024,7 +5024,7 @@
         <p:spPr>
           <a:xfrm>
             <a:off x="5507841" y="2697480"/>
-            <a:ext cx="1145837" cy="3611880"/>
+            <a:ext cx="1935617" cy="3611880"/>
           </a:xfrm>
           <a:prstGeom prst="rect">
             <a:avLst/>
@@ -6407,8 +6407,8 @@
         </p:blipFill>
         <p:spPr>
           <a:xfrm>
-            <a:off x="5032048" y="1417320"/>
-            <a:ext cx="2097423" cy="4846320"/>
+            <a:off x="4084259" y="2040480"/>
+            <a:ext cx="3993000" cy="3600000"/>
           </a:xfrm>
           <a:prstGeom prst="rect">
             <a:avLst/>
